--- a/evals/previews/prevalent-cases-survival-bias/prevalent-cases-survival-bias.pptx
+++ b/evals/previews/prevalent-cases-survival-bias/prevalent-cases-survival-bias.pptx
@@ -2,13 +2,13 @@
 <file path=ppt/presentation.xml><?xml version="1.0" encoding="utf-8"?>
 <p:presentation xmlns:p="http://schemas.openxmlformats.org/presentationml/2006/main">
   <p:sldMasterIdLst>
-    <p:sldMasterId xmlns:r="http://schemas.openxmlformats.org/officeDocument/2006/relationships" id="2147483648" r:id="Rafd5a3983aa6466b"/>
+    <p:sldMasterId xmlns:r="http://schemas.openxmlformats.org/officeDocument/2006/relationships" id="2147483648" r:id="R41fb4f53b85d4efe"/>
   </p:sldMasterIdLst>
   <p:notesMasterIdLst>
-    <p:notesMasterId xmlns:r="http://schemas.openxmlformats.org/officeDocument/2006/relationships" r:id="Rf455e3af5de8422a"/>
+    <p:notesMasterId xmlns:r="http://schemas.openxmlformats.org/officeDocument/2006/relationships" r:id="R9b0499842051482b"/>
   </p:notesMasterIdLst>
   <p:sldIdLst>
-    <p:sldId xmlns:r="http://schemas.openxmlformats.org/officeDocument/2006/relationships" id="256" r:id="R4b73ddf976bb4507"/>
+    <p:sldId xmlns:r="http://schemas.openxmlformats.org/officeDocument/2006/relationships" id="256" r:id="R39fd8fa20f3f4eae"/>
   </p:sldIdLst>
   <p:sldSz cx="42805350" cy="30279975"/>
   <p:notesSz cx="6858000" cy="9144000"/>
@@ -525,7 +525,7 @@
   </p:cSld>
   <p:clrMap bg1="lt1" tx1="dk1" bg2="lt2" tx2="dk2" accent1="accent1" accent2="accent2" accent3="accent3" accent4="accent4" accent5="accent5" accent6="accent6" hlink="hlink" folHlink="folHlink"/>
   <p:sldLayoutIdLst>
-    <p:sldLayoutId xmlns:r="http://schemas.openxmlformats.org/officeDocument/2006/relationships" id="2147483649" r:id="R1fb8588e2a36437f"/>
+    <p:sldLayoutId xmlns:r="http://schemas.openxmlformats.org/officeDocument/2006/relationships" id="2147483649" r:id="Rd9ceb476c9804337"/>
   </p:sldLayoutIdLst>
   <p:txStyles>
     <p:titleStyle>
@@ -1076,7 +1076,7 @@
           <p:cNvPr id="92" name="header-band">
             <a:extLst xmlns:a="http://schemas.openxmlformats.org/drawingml/2006/main">
               <a:ext uri="{FF2B5EF4-FFF2-40B4-BE49-F238E27FC236}">
-                <a16:creationId xmlns:a16="http://schemas.microsoft.com/office/drawing/2014/main" id="{D963D768-E1A8-46D2-AD5E-BF135A2DECD9}"/>
+                <a16:creationId xmlns:a16="http://schemas.microsoft.com/office/drawing/2014/main" id="{639C7D80-64A7-49A1-8D1F-2F5CA7F06E01}"/>
               </a:ext>
             </a:extLst>
           </p:cNvPr>
@@ -1109,7 +1109,7 @@
           <p:cNvPr id="2" name="top-accent">
             <a:extLst xmlns:a="http://schemas.openxmlformats.org/drawingml/2006/main">
               <a:ext uri="{FF2B5EF4-FFF2-40B4-BE49-F238E27FC236}">
-                <a16:creationId xmlns:a16="http://schemas.microsoft.com/office/drawing/2014/main" id="{0CB74700-F726-47D8-94E9-69525BFF82FA}"/>
+                <a16:creationId xmlns:a16="http://schemas.microsoft.com/office/drawing/2014/main" id="{EA7A78F7-8C63-4F63-AD99-8E699409DBD3}"/>
               </a:ext>
             </a:extLst>
           </p:cNvPr>
@@ -1142,7 +1142,7 @@
           <p:cNvPr id="3" name="poster-title">
             <a:extLst xmlns:a="http://schemas.openxmlformats.org/drawingml/2006/main">
               <a:ext uri="{FF2B5EF4-FFF2-40B4-BE49-F238E27FC236}">
-                <a16:creationId xmlns:a16="http://schemas.microsoft.com/office/drawing/2014/main" id="{C282AB1A-7AD2-4315-ABFA-82FF9E7F8F69}"/>
+                <a16:creationId xmlns:a16="http://schemas.microsoft.com/office/drawing/2014/main" id="{234EB6D1-626A-4B19-9677-11DA7A6A8ED2}"/>
               </a:ext>
             </a:extLst>
           </p:cNvPr>
@@ -1192,7 +1192,7 @@
           <p:cNvPr id="4" name="authors">
             <a:extLst xmlns:a="http://schemas.openxmlformats.org/drawingml/2006/main">
               <a:ext uri="{FF2B5EF4-FFF2-40B4-BE49-F238E27FC236}">
-                <a16:creationId xmlns:a16="http://schemas.microsoft.com/office/drawing/2014/main" id="{18431E7C-EE17-4061-98C2-9342A5D4D6A1}"/>
+                <a16:creationId xmlns:a16="http://schemas.microsoft.com/office/drawing/2014/main" id="{1AD1BF25-17D0-4F7E-B684-D2275B2087BA}"/>
               </a:ext>
             </a:extLst>
           </p:cNvPr>
@@ -1242,7 +1242,7 @@
           <p:cNvPr id="5" name="affiliations">
             <a:extLst xmlns:a="http://schemas.openxmlformats.org/drawingml/2006/main">
               <a:ext uri="{FF2B5EF4-FFF2-40B4-BE49-F238E27FC236}">
-                <a16:creationId xmlns:a16="http://schemas.microsoft.com/office/drawing/2014/main" id="{07292A28-944D-492E-A1C1-3519A0E8DE39}"/>
+                <a16:creationId xmlns:a16="http://schemas.microsoft.com/office/drawing/2014/main" id="{D1366744-88C9-4974-B9C9-992AF6107912}"/>
               </a:ext>
             </a:extLst>
           </p:cNvPr>
@@ -1292,7 +1292,7 @@
           <p:cNvPr id="6" name="citation">
             <a:extLst xmlns:a="http://schemas.openxmlformats.org/drawingml/2006/main">
               <a:ext uri="{FF2B5EF4-FFF2-40B4-BE49-F238E27FC236}">
-                <a16:creationId xmlns:a16="http://schemas.microsoft.com/office/drawing/2014/main" id="{A8C83F46-9577-49CC-9056-4F4B17E9B7DD}"/>
+                <a16:creationId xmlns:a16="http://schemas.microsoft.com/office/drawing/2014/main" id="{56CE8EBC-F149-4340-8FE6-E515F6D96EC7}"/>
               </a:ext>
             </a:extLst>
           </p:cNvPr>
@@ -1342,7 +1342,7 @@
           <p:cNvPr id="7" name="logo-slot-institution-logo">
             <a:extLst xmlns:a="http://schemas.openxmlformats.org/drawingml/2006/main">
               <a:ext uri="{FF2B5EF4-FFF2-40B4-BE49-F238E27FC236}">
-                <a16:creationId xmlns:a16="http://schemas.microsoft.com/office/drawing/2014/main" id="{1CBA8C96-A41F-451B-B199-6DB38355965F}"/>
+                <a16:creationId xmlns:a16="http://schemas.microsoft.com/office/drawing/2014/main" id="{0D5A306E-F4DA-4E66-ACAA-09D67FCBB622}"/>
               </a:ext>
             </a:extLst>
           </p:cNvPr>
@@ -1377,7 +1377,7 @@
           <p:cNvPr id="8" name="logo-placeholder-institution-logo">
             <a:extLst xmlns:a="http://schemas.openxmlformats.org/drawingml/2006/main">
               <a:ext uri="{FF2B5EF4-FFF2-40B4-BE49-F238E27FC236}">
-                <a16:creationId xmlns:a16="http://schemas.microsoft.com/office/drawing/2014/main" id="{99F5CA6B-9999-4546-A140-A8F763B5EFD7}"/>
+                <a16:creationId xmlns:a16="http://schemas.microsoft.com/office/drawing/2014/main" id="{D6D3A79B-DC7B-4AB2-85FE-351BF1B17CF6}"/>
               </a:ext>
             </a:extLst>
           </p:cNvPr>
@@ -1427,7 +1427,7 @@
           <p:cNvPr id="9" name="header-summary">
             <a:extLst xmlns:a="http://schemas.openxmlformats.org/drawingml/2006/main">
               <a:ext uri="{FF2B5EF4-FFF2-40B4-BE49-F238E27FC236}">
-                <a16:creationId xmlns:a16="http://schemas.microsoft.com/office/drawing/2014/main" id="{09A5717E-CA92-4D7C-9CCD-7A3CB10E8076}"/>
+                <a16:creationId xmlns:a16="http://schemas.microsoft.com/office/drawing/2014/main" id="{0B9ACC6B-6D68-4363-9DD8-FF15CA9259B7}"/>
               </a:ext>
             </a:extLst>
           </p:cNvPr>
@@ -1460,7 +1460,7 @@
           <p:cNvPr id="10" name="header-metric-1-value">
             <a:extLst xmlns:a="http://schemas.openxmlformats.org/drawingml/2006/main">
               <a:ext uri="{FF2B5EF4-FFF2-40B4-BE49-F238E27FC236}">
-                <a16:creationId xmlns:a16="http://schemas.microsoft.com/office/drawing/2014/main" id="{6DE9B065-D649-4549-939A-FC8651C4F906}"/>
+                <a16:creationId xmlns:a16="http://schemas.microsoft.com/office/drawing/2014/main" id="{16F1E234-1C44-425B-9D7E-F84AD06FDB13}"/>
               </a:ext>
             </a:extLst>
           </p:cNvPr>
@@ -1510,7 +1510,7 @@
           <p:cNvPr id="11" name="header-metric-1-label">
             <a:extLst xmlns:a="http://schemas.openxmlformats.org/drawingml/2006/main">
               <a:ext uri="{FF2B5EF4-FFF2-40B4-BE49-F238E27FC236}">
-                <a16:creationId xmlns:a16="http://schemas.microsoft.com/office/drawing/2014/main" id="{E9AC1701-9815-4B32-B739-3470C2D80ACB}"/>
+                <a16:creationId xmlns:a16="http://schemas.microsoft.com/office/drawing/2014/main" id="{F797D585-D852-42B4-8940-099380A1A958}"/>
               </a:ext>
             </a:extLst>
           </p:cNvPr>
@@ -1560,7 +1560,7 @@
           <p:cNvPr id="12" name="header-metric-2-value">
             <a:extLst xmlns:a="http://schemas.openxmlformats.org/drawingml/2006/main">
               <a:ext uri="{FF2B5EF4-FFF2-40B4-BE49-F238E27FC236}">
-                <a16:creationId xmlns:a16="http://schemas.microsoft.com/office/drawing/2014/main" id="{652DD6E0-E3E1-4F76-B60E-DE7517D19825}"/>
+                <a16:creationId xmlns:a16="http://schemas.microsoft.com/office/drawing/2014/main" id="{DBE6E7D1-8D6D-41F0-9106-9F5C7AC9138B}"/>
               </a:ext>
             </a:extLst>
           </p:cNvPr>
@@ -1610,7 +1610,7 @@
           <p:cNvPr id="13" name="header-metric-2-label">
             <a:extLst xmlns:a="http://schemas.openxmlformats.org/drawingml/2006/main">
               <a:ext uri="{FF2B5EF4-FFF2-40B4-BE49-F238E27FC236}">
-                <a16:creationId xmlns:a16="http://schemas.microsoft.com/office/drawing/2014/main" id="{9A9A55AC-D42E-4AA5-AF52-5BE9DC63A0AA}"/>
+                <a16:creationId xmlns:a16="http://schemas.microsoft.com/office/drawing/2014/main" id="{E9BC5331-37EA-4812-BEFE-CA0D0802643B}"/>
               </a:ext>
             </a:extLst>
           </p:cNvPr>
@@ -1660,7 +1660,7 @@
           <p:cNvPr id="14" name="header-metric-3-value">
             <a:extLst xmlns:a="http://schemas.openxmlformats.org/drawingml/2006/main">
               <a:ext uri="{FF2B5EF4-FFF2-40B4-BE49-F238E27FC236}">
-                <a16:creationId xmlns:a16="http://schemas.microsoft.com/office/drawing/2014/main" id="{166D72C4-4B22-4980-8252-3036564E5825}"/>
+                <a16:creationId xmlns:a16="http://schemas.microsoft.com/office/drawing/2014/main" id="{A9AA6FE8-F63A-4DAF-BA3C-DC73A0896A42}"/>
               </a:ext>
             </a:extLst>
           </p:cNvPr>
@@ -1710,7 +1710,7 @@
           <p:cNvPr id="15" name="header-metric-3-label">
             <a:extLst xmlns:a="http://schemas.openxmlformats.org/drawingml/2006/main">
               <a:ext uri="{FF2B5EF4-FFF2-40B4-BE49-F238E27FC236}">
-                <a16:creationId xmlns:a16="http://schemas.microsoft.com/office/drawing/2014/main" id="{4C17FDC9-9B84-4044-BB7C-FD6B0394EF23}"/>
+                <a16:creationId xmlns:a16="http://schemas.microsoft.com/office/drawing/2014/main" id="{0FE06275-BBA2-4FDB-9346-EA43C9076C41}"/>
               </a:ext>
             </a:extLst>
           </p:cNvPr>
@@ -1760,7 +1760,7 @@
           <p:cNvPr id="16" name="question-title">
             <a:extLst xmlns:a="http://schemas.openxmlformats.org/drawingml/2006/main">
               <a:ext uri="{FF2B5EF4-FFF2-40B4-BE49-F238E27FC236}">
-                <a16:creationId xmlns:a16="http://schemas.microsoft.com/office/drawing/2014/main" id="{C1BD13E6-1009-4D37-8D3C-EC0282F96997}"/>
+                <a16:creationId xmlns:a16="http://schemas.microsoft.com/office/drawing/2014/main" id="{7E85EC81-C42F-48EC-8A7F-7376757B7C4A}"/>
               </a:ext>
             </a:extLst>
           </p:cNvPr>
@@ -1810,7 +1810,7 @@
           <p:cNvPr id="17" name="question-rule">
             <a:extLst xmlns:a="http://schemas.openxmlformats.org/drawingml/2006/main">
               <a:ext uri="{FF2B5EF4-FFF2-40B4-BE49-F238E27FC236}">
-                <a16:creationId xmlns:a16="http://schemas.microsoft.com/office/drawing/2014/main" id="{E51EB85B-F5DC-4493-895D-818BF993C105}"/>
+                <a16:creationId xmlns:a16="http://schemas.microsoft.com/office/drawing/2014/main" id="{5C117EE4-D829-4C01-9F7F-1A8EF74EDC51}"/>
               </a:ext>
             </a:extLst>
           </p:cNvPr>
@@ -1843,7 +1843,7 @@
           <p:cNvPr id="18" name="research-question">
             <a:extLst xmlns:a="http://schemas.openxmlformats.org/drawingml/2006/main">
               <a:ext uri="{FF2B5EF4-FFF2-40B4-BE49-F238E27FC236}">
-                <a16:creationId xmlns:a16="http://schemas.microsoft.com/office/drawing/2014/main" id="{ED8BE95C-187D-4FF9-8668-B5B88E9E0BCC}"/>
+                <a16:creationId xmlns:a16="http://schemas.microsoft.com/office/drawing/2014/main" id="{132F6EBA-A0A7-467F-B9CC-BA720C0ECC27}"/>
               </a:ext>
             </a:extLst>
           </p:cNvPr>
@@ -1893,7 +1893,7 @@
           <p:cNvPr id="19" name="question-evidence">
             <a:extLst xmlns:a="http://schemas.openxmlformats.org/drawingml/2006/main">
               <a:ext uri="{FF2B5EF4-FFF2-40B4-BE49-F238E27FC236}">
-                <a16:creationId xmlns:a16="http://schemas.microsoft.com/office/drawing/2014/main" id="{FA73F8F3-400B-45E9-9C8E-4F89AC5F6A4E}"/>
+                <a16:creationId xmlns:a16="http://schemas.microsoft.com/office/drawing/2014/main" id="{0F6469FE-3787-4BBB-84ED-57635AB30AEB}"/>
               </a:ext>
             </a:extLst>
           </p:cNvPr>
@@ -1943,7 +1943,7 @@
           <p:cNvPr id="20" name="pipeline-title">
             <a:extLst xmlns:a="http://schemas.openxmlformats.org/drawingml/2006/main">
               <a:ext uri="{FF2B5EF4-FFF2-40B4-BE49-F238E27FC236}">
-                <a16:creationId xmlns:a16="http://schemas.microsoft.com/office/drawing/2014/main" id="{73972FC0-CD31-41DC-B9B6-72277A01F4E3}"/>
+                <a16:creationId xmlns:a16="http://schemas.microsoft.com/office/drawing/2014/main" id="{680A7456-1E39-4526-ACE2-BA096553F8C1}"/>
               </a:ext>
             </a:extLst>
           </p:cNvPr>
@@ -1993,7 +1993,7 @@
           <p:cNvPr id="21" name="pipeline-rule">
             <a:extLst xmlns:a="http://schemas.openxmlformats.org/drawingml/2006/main">
               <a:ext uri="{FF2B5EF4-FFF2-40B4-BE49-F238E27FC236}">
-                <a16:creationId xmlns:a16="http://schemas.microsoft.com/office/drawing/2014/main" id="{7319F175-44B4-4CF5-884E-7C711306761B}"/>
+                <a16:creationId xmlns:a16="http://schemas.microsoft.com/office/drawing/2014/main" id="{A6E7E3C7-CA69-4FC9-8817-9457F051335E}"/>
               </a:ext>
             </a:extLst>
           </p:cNvPr>
@@ -2026,7 +2026,7 @@
           <p:cNvPr id="22" name="pipeline-1-number-bg">
             <a:extLst xmlns:a="http://schemas.openxmlformats.org/drawingml/2006/main">
               <a:ext uri="{FF2B5EF4-FFF2-40B4-BE49-F238E27FC236}">
-                <a16:creationId xmlns:a16="http://schemas.microsoft.com/office/drawing/2014/main" id="{6146A8E0-3E28-4E66-A1B0-256075556F47}"/>
+                <a16:creationId xmlns:a16="http://schemas.microsoft.com/office/drawing/2014/main" id="{64D12FD8-6D68-4AD5-9570-E33915888CF6}"/>
               </a:ext>
             </a:extLst>
           </p:cNvPr>
@@ -2059,7 +2059,7 @@
           <p:cNvPr id="23" name="pipeline-1-number">
             <a:extLst xmlns:a="http://schemas.openxmlformats.org/drawingml/2006/main">
               <a:ext uri="{FF2B5EF4-FFF2-40B4-BE49-F238E27FC236}">
-                <a16:creationId xmlns:a16="http://schemas.microsoft.com/office/drawing/2014/main" id="{7D9858B9-47E8-457C-8BEF-41F93A256AE1}"/>
+                <a16:creationId xmlns:a16="http://schemas.microsoft.com/office/drawing/2014/main" id="{1B66CAAF-BF5E-494D-94A1-46366094E28D}"/>
               </a:ext>
             </a:extLst>
           </p:cNvPr>
@@ -2109,7 +2109,7 @@
           <p:cNvPr id="24" name="pipeline-1-text">
             <a:extLst xmlns:a="http://schemas.openxmlformats.org/drawingml/2006/main">
               <a:ext uri="{FF2B5EF4-FFF2-40B4-BE49-F238E27FC236}">
-                <a16:creationId xmlns:a16="http://schemas.microsoft.com/office/drawing/2014/main" id="{2DC06280-76D6-4DEC-B504-9F3A8791826B}"/>
+                <a16:creationId xmlns:a16="http://schemas.microsoft.com/office/drawing/2014/main" id="{FD1360AE-3740-4EB0-A8C0-0F8AB41689A2}"/>
               </a:ext>
             </a:extLst>
           </p:cNvPr>
@@ -2159,7 +2159,7 @@
           <p:cNvPr id="25" name="pipeline-2-number-bg">
             <a:extLst xmlns:a="http://schemas.openxmlformats.org/drawingml/2006/main">
               <a:ext uri="{FF2B5EF4-FFF2-40B4-BE49-F238E27FC236}">
-                <a16:creationId xmlns:a16="http://schemas.microsoft.com/office/drawing/2014/main" id="{DEAF4666-4766-4507-B3D7-DF107AF79B64}"/>
+                <a16:creationId xmlns:a16="http://schemas.microsoft.com/office/drawing/2014/main" id="{65A9C5BF-911A-4E55-8594-B645E7DC30A2}"/>
               </a:ext>
             </a:extLst>
           </p:cNvPr>
@@ -2192,7 +2192,7 @@
           <p:cNvPr id="26" name="pipeline-2-number">
             <a:extLst xmlns:a="http://schemas.openxmlformats.org/drawingml/2006/main">
               <a:ext uri="{FF2B5EF4-FFF2-40B4-BE49-F238E27FC236}">
-                <a16:creationId xmlns:a16="http://schemas.microsoft.com/office/drawing/2014/main" id="{3ADCB7B4-09F4-42B2-884E-12ECE9B08FCA}"/>
+                <a16:creationId xmlns:a16="http://schemas.microsoft.com/office/drawing/2014/main" id="{24A04B3C-AF4E-4535-95C0-EB2C61EA4C89}"/>
               </a:ext>
             </a:extLst>
           </p:cNvPr>
@@ -2242,7 +2242,7 @@
           <p:cNvPr id="27" name="pipeline-2-text">
             <a:extLst xmlns:a="http://schemas.openxmlformats.org/drawingml/2006/main">
               <a:ext uri="{FF2B5EF4-FFF2-40B4-BE49-F238E27FC236}">
-                <a16:creationId xmlns:a16="http://schemas.microsoft.com/office/drawing/2014/main" id="{6E3D9BF7-258B-498C-8C41-3D4B6D86899A}"/>
+                <a16:creationId xmlns:a16="http://schemas.microsoft.com/office/drawing/2014/main" id="{88443D5C-B473-4D35-AF11-B627645722AB}"/>
               </a:ext>
             </a:extLst>
           </p:cNvPr>
@@ -2292,7 +2292,7 @@
           <p:cNvPr id="28" name="pipeline-3-number-bg">
             <a:extLst xmlns:a="http://schemas.openxmlformats.org/drawingml/2006/main">
               <a:ext uri="{FF2B5EF4-FFF2-40B4-BE49-F238E27FC236}">
-                <a16:creationId xmlns:a16="http://schemas.microsoft.com/office/drawing/2014/main" id="{968A9921-9B55-4935-9C5B-993D625C5C9F}"/>
+                <a16:creationId xmlns:a16="http://schemas.microsoft.com/office/drawing/2014/main" id="{328529EA-A39B-4CB6-88B8-22AA0B45050E}"/>
               </a:ext>
             </a:extLst>
           </p:cNvPr>
@@ -2325,7 +2325,7 @@
           <p:cNvPr id="29" name="pipeline-3-number">
             <a:extLst xmlns:a="http://schemas.openxmlformats.org/drawingml/2006/main">
               <a:ext uri="{FF2B5EF4-FFF2-40B4-BE49-F238E27FC236}">
-                <a16:creationId xmlns:a16="http://schemas.microsoft.com/office/drawing/2014/main" id="{F8B052C9-6349-4ACB-AD7D-B27214F60D31}"/>
+                <a16:creationId xmlns:a16="http://schemas.microsoft.com/office/drawing/2014/main" id="{B9496805-17D6-4B9A-A8A5-C31420442671}"/>
               </a:ext>
             </a:extLst>
           </p:cNvPr>
@@ -2375,7 +2375,7 @@
           <p:cNvPr id="30" name="pipeline-3-text">
             <a:extLst xmlns:a="http://schemas.openxmlformats.org/drawingml/2006/main">
               <a:ext uri="{FF2B5EF4-FFF2-40B4-BE49-F238E27FC236}">
-                <a16:creationId xmlns:a16="http://schemas.microsoft.com/office/drawing/2014/main" id="{55EBC4FD-D7F5-4BFC-8729-2A6E8773677B}"/>
+                <a16:creationId xmlns:a16="http://schemas.microsoft.com/office/drawing/2014/main" id="{AB77668B-30E6-4A67-92E1-BB7C23B9BD4D}"/>
               </a:ext>
             </a:extLst>
           </p:cNvPr>
@@ -2425,7 +2425,7 @@
           <p:cNvPr id="31" name="pipeline-4-number-bg">
             <a:extLst xmlns:a="http://schemas.openxmlformats.org/drawingml/2006/main">
               <a:ext uri="{FF2B5EF4-FFF2-40B4-BE49-F238E27FC236}">
-                <a16:creationId xmlns:a16="http://schemas.microsoft.com/office/drawing/2014/main" id="{526CBD9D-6DD3-4DBB-88FF-65DAE2963FDA}"/>
+                <a16:creationId xmlns:a16="http://schemas.microsoft.com/office/drawing/2014/main" id="{E273226C-2E0B-4E90-92EE-A7FFF26723D9}"/>
               </a:ext>
             </a:extLst>
           </p:cNvPr>
@@ -2458,7 +2458,7 @@
           <p:cNvPr id="32" name="pipeline-4-number">
             <a:extLst xmlns:a="http://schemas.openxmlformats.org/drawingml/2006/main">
               <a:ext uri="{FF2B5EF4-FFF2-40B4-BE49-F238E27FC236}">
-                <a16:creationId xmlns:a16="http://schemas.microsoft.com/office/drawing/2014/main" id="{42C5B293-9DA3-419C-8EEA-F6C5ACD82F29}"/>
+                <a16:creationId xmlns:a16="http://schemas.microsoft.com/office/drawing/2014/main" id="{F395A98D-827E-42C0-9D97-89F47F226C7B}"/>
               </a:ext>
             </a:extLst>
           </p:cNvPr>
@@ -2508,7 +2508,7 @@
           <p:cNvPr id="33" name="pipeline-4-text">
             <a:extLst xmlns:a="http://schemas.openxmlformats.org/drawingml/2006/main">
               <a:ext uri="{FF2B5EF4-FFF2-40B4-BE49-F238E27FC236}">
-                <a16:creationId xmlns:a16="http://schemas.microsoft.com/office/drawing/2014/main" id="{4507977A-F0E7-41BD-A2B2-4E3101F1DDB7}"/>
+                <a16:creationId xmlns:a16="http://schemas.microsoft.com/office/drawing/2014/main" id="{67AEDBCE-A285-4613-930D-8663CB7C32FD}"/>
               </a:ext>
             </a:extLst>
           </p:cNvPr>
@@ -2558,7 +2558,7 @@
           <p:cNvPr id="34" name="dataset-panel">
             <a:extLst xmlns:a="http://schemas.openxmlformats.org/drawingml/2006/main">
               <a:ext uri="{FF2B5EF4-FFF2-40B4-BE49-F238E27FC236}">
-                <a16:creationId xmlns:a16="http://schemas.microsoft.com/office/drawing/2014/main" id="{A4053600-B833-4E87-A472-9CCC86212CD5}"/>
+                <a16:creationId xmlns:a16="http://schemas.microsoft.com/office/drawing/2014/main" id="{6667F562-0918-43AF-8840-6B9F48F0FD6E}"/>
               </a:ext>
             </a:extLst>
           </p:cNvPr>
@@ -2593,7 +2593,7 @@
           <p:cNvPr id="35" name="dataset-kicker">
             <a:extLst xmlns:a="http://schemas.openxmlformats.org/drawingml/2006/main">
               <a:ext uri="{FF2B5EF4-FFF2-40B4-BE49-F238E27FC236}">
-                <a16:creationId xmlns:a16="http://schemas.microsoft.com/office/drawing/2014/main" id="{FA3AC925-B9D5-439F-B53A-4D7EC90D56D8}"/>
+                <a16:creationId xmlns:a16="http://schemas.microsoft.com/office/drawing/2014/main" id="{257CCFD7-8BDF-4164-BC75-0D1E1B75C27C}"/>
               </a:ext>
             </a:extLst>
           </p:cNvPr>
@@ -2643,7 +2643,7 @@
           <p:cNvPr id="36" name="datasets">
             <a:extLst xmlns:a="http://schemas.openxmlformats.org/drawingml/2006/main">
               <a:ext uri="{FF2B5EF4-FFF2-40B4-BE49-F238E27FC236}">
-                <a16:creationId xmlns:a16="http://schemas.microsoft.com/office/drawing/2014/main" id="{FD7DDD79-8278-41B4-B225-78511B9E0C43}"/>
+                <a16:creationId xmlns:a16="http://schemas.microsoft.com/office/drawing/2014/main" id="{C0D65D83-D44F-4FD6-9558-C68278751FEC}"/>
               </a:ext>
             </a:extLst>
           </p:cNvPr>
@@ -2744,7 +2744,7 @@
           <p:cNvPr id="37" name="dataset-evidence">
             <a:extLst xmlns:a="http://schemas.openxmlformats.org/drawingml/2006/main">
               <a:ext uri="{FF2B5EF4-FFF2-40B4-BE49-F238E27FC236}">
-                <a16:creationId xmlns:a16="http://schemas.microsoft.com/office/drawing/2014/main" id="{581451E1-98D9-41A9-AFBA-2958909A400A}"/>
+                <a16:creationId xmlns:a16="http://schemas.microsoft.com/office/drawing/2014/main" id="{BBFD09E8-D0E5-40D5-B00E-FE64FF716D84}"/>
               </a:ext>
             </a:extLst>
           </p:cNvPr>
@@ -2794,7 +2794,7 @@
           <p:cNvPr id="38" name="figure-one-heading-title">
             <a:extLst xmlns:a="http://schemas.openxmlformats.org/drawingml/2006/main">
               <a:ext uri="{FF2B5EF4-FFF2-40B4-BE49-F238E27FC236}">
-                <a16:creationId xmlns:a16="http://schemas.microsoft.com/office/drawing/2014/main" id="{7213FDC2-0540-4AB9-8F32-F31BC16DC5EC}"/>
+                <a16:creationId xmlns:a16="http://schemas.microsoft.com/office/drawing/2014/main" id="{F819C26B-98B4-4947-A8DA-3568190EC581}"/>
               </a:ext>
             </a:extLst>
           </p:cNvPr>
@@ -2844,7 +2844,7 @@
           <p:cNvPr id="39" name="figure-one-heading-rule">
             <a:extLst xmlns:a="http://schemas.openxmlformats.org/drawingml/2006/main">
               <a:ext uri="{FF2B5EF4-FFF2-40B4-BE49-F238E27FC236}">
-                <a16:creationId xmlns:a16="http://schemas.microsoft.com/office/drawing/2014/main" id="{827FC90F-534C-41F7-ADD2-4DA05735C895}"/>
+                <a16:creationId xmlns:a16="http://schemas.microsoft.com/office/drawing/2014/main" id="{6DABC352-9A17-45DD-8D02-BC12E21691C7}"/>
               </a:ext>
             </a:extLst>
           </p:cNvPr>
@@ -2877,7 +2877,7 @@
           <p:cNvPr id="40" name="figure-one-frame">
             <a:extLst xmlns:a="http://schemas.openxmlformats.org/drawingml/2006/main">
               <a:ext uri="{FF2B5EF4-FFF2-40B4-BE49-F238E27FC236}">
-                <a16:creationId xmlns:a16="http://schemas.microsoft.com/office/drawing/2014/main" id="{50D3B711-DE22-4B88-BD4D-76C520A4D036}"/>
+                <a16:creationId xmlns:a16="http://schemas.microsoft.com/office/drawing/2014/main" id="{CF9BF574-7853-4EFB-ABF8-FE4E2FB2A328}"/>
               </a:ext>
             </a:extLst>
           </p:cNvPr>
@@ -2912,7 +2912,7 @@
           <p:cNvPr id="41" name="figure-one-placeholder">
             <a:extLst xmlns:a="http://schemas.openxmlformats.org/drawingml/2006/main">
               <a:ext uri="{FF2B5EF4-FFF2-40B4-BE49-F238E27FC236}">
-                <a16:creationId xmlns:a16="http://schemas.microsoft.com/office/drawing/2014/main" id="{158831CC-1E02-4C58-8A22-2D183EFA4C35}"/>
+                <a16:creationId xmlns:a16="http://schemas.microsoft.com/office/drawing/2014/main" id="{8796C9D7-E786-49A1-AE1E-2970016C894F}"/>
               </a:ext>
             </a:extLst>
           </p:cNvPr>
@@ -2947,7 +2947,7 @@
           <p:cNvPr id="42" name="figure-one-placeholder-label">
             <a:extLst xmlns:a="http://schemas.openxmlformats.org/drawingml/2006/main">
               <a:ext uri="{FF2B5EF4-FFF2-40B4-BE49-F238E27FC236}">
-                <a16:creationId xmlns:a16="http://schemas.microsoft.com/office/drawing/2014/main" id="{4B7A8134-396A-4329-9A7B-2A97FD9F8512}"/>
+                <a16:creationId xmlns:a16="http://schemas.microsoft.com/office/drawing/2014/main" id="{10085113-4C9F-41BA-B44C-0EAFD8522E79}"/>
               </a:ext>
             </a:extLst>
           </p:cNvPr>
@@ -2997,7 +2997,7 @@
           <p:cNvPr id="43" name="figure-one-caption">
             <a:extLst xmlns:a="http://schemas.openxmlformats.org/drawingml/2006/main">
               <a:ext uri="{FF2B5EF4-FFF2-40B4-BE49-F238E27FC236}">
-                <a16:creationId xmlns:a16="http://schemas.microsoft.com/office/drawing/2014/main" id="{14C12F4D-4DD8-4B6C-B0DA-BF7A63E302C9}"/>
+                <a16:creationId xmlns:a16="http://schemas.microsoft.com/office/drawing/2014/main" id="{9967C814-FB13-4B8A-B132-41845CD4A8B3}"/>
               </a:ext>
             </a:extLst>
           </p:cNvPr>
@@ -3047,7 +3047,7 @@
           <p:cNvPr id="44" name="figure-one-source">
             <a:extLst xmlns:a="http://schemas.openxmlformats.org/drawingml/2006/main">
               <a:ext uri="{FF2B5EF4-FFF2-40B4-BE49-F238E27FC236}">
-                <a16:creationId xmlns:a16="http://schemas.microsoft.com/office/drawing/2014/main" id="{0709A355-1A65-4054-88AC-7417A43F4229}"/>
+                <a16:creationId xmlns:a16="http://schemas.microsoft.com/office/drawing/2014/main" id="{E410F08C-F1BA-4430-BCDE-F7DCECDB0FC5}"/>
               </a:ext>
             </a:extLst>
           </p:cNvPr>
@@ -3097,7 +3097,7 @@
           <p:cNvPr id="45" name="central-takeaway">
             <a:extLst xmlns:a="http://schemas.openxmlformats.org/drawingml/2006/main">
               <a:ext uri="{FF2B5EF4-FFF2-40B4-BE49-F238E27FC236}">
-                <a16:creationId xmlns:a16="http://schemas.microsoft.com/office/drawing/2014/main" id="{E752A84C-DCDE-4C72-9AA5-D2FE405CF1A9}"/>
+                <a16:creationId xmlns:a16="http://schemas.microsoft.com/office/drawing/2014/main" id="{93189574-CB1A-4B31-864C-34315CBDEEDD}"/>
               </a:ext>
             </a:extLst>
           </p:cNvPr>
@@ -3130,7 +3130,7 @@
           <p:cNvPr id="46" name="central-takeaway-title">
             <a:extLst xmlns:a="http://schemas.openxmlformats.org/drawingml/2006/main">
               <a:ext uri="{FF2B5EF4-FFF2-40B4-BE49-F238E27FC236}">
-                <a16:creationId xmlns:a16="http://schemas.microsoft.com/office/drawing/2014/main" id="{360D195F-0391-4BC5-A1A5-1BF8710FA9B2}"/>
+                <a16:creationId xmlns:a16="http://schemas.microsoft.com/office/drawing/2014/main" id="{CCE9F13B-68F2-4BF5-9C6C-7787B1E6CDA9}"/>
               </a:ext>
             </a:extLst>
           </p:cNvPr>
@@ -3180,7 +3180,7 @@
           <p:cNvPr id="47" name="central-takeaway-subtitle">
             <a:extLst xmlns:a="http://schemas.openxmlformats.org/drawingml/2006/main">
               <a:ext uri="{FF2B5EF4-FFF2-40B4-BE49-F238E27FC236}">
-                <a16:creationId xmlns:a16="http://schemas.microsoft.com/office/drawing/2014/main" id="{A3A03D48-6992-45BF-A888-A753648096D1}"/>
+                <a16:creationId xmlns:a16="http://schemas.microsoft.com/office/drawing/2014/main" id="{A2075B36-7558-4A09-92C0-8A98A734F020}"/>
               </a:ext>
             </a:extLst>
           </p:cNvPr>
@@ -3230,7 +3230,7 @@
           <p:cNvPr id="48" name="takeaway-evidence">
             <a:extLst xmlns:a="http://schemas.openxmlformats.org/drawingml/2006/main">
               <a:ext uri="{FF2B5EF4-FFF2-40B4-BE49-F238E27FC236}">
-                <a16:creationId xmlns:a16="http://schemas.microsoft.com/office/drawing/2014/main" id="{143A5CA5-873C-4767-B174-1F20A7D9AD55}"/>
+                <a16:creationId xmlns:a16="http://schemas.microsoft.com/office/drawing/2014/main" id="{710D2D4B-D6D7-42D5-A89B-F3F74DAD5456}"/>
               </a:ext>
             </a:extLst>
           </p:cNvPr>
@@ -3280,7 +3280,7 @@
           <p:cNvPr id="49" name="figure-two-heading-title">
             <a:extLst xmlns:a="http://schemas.openxmlformats.org/drawingml/2006/main">
               <a:ext uri="{FF2B5EF4-FFF2-40B4-BE49-F238E27FC236}">
-                <a16:creationId xmlns:a16="http://schemas.microsoft.com/office/drawing/2014/main" id="{E7A04C79-37B7-459F-BA06-33B8980B78A9}"/>
+                <a16:creationId xmlns:a16="http://schemas.microsoft.com/office/drawing/2014/main" id="{87DAEC97-1A1E-4D0B-B807-B02883E76A31}"/>
               </a:ext>
             </a:extLst>
           </p:cNvPr>
@@ -3330,7 +3330,7 @@
           <p:cNvPr id="50" name="figure-two-heading-rule">
             <a:extLst xmlns:a="http://schemas.openxmlformats.org/drawingml/2006/main">
               <a:ext uri="{FF2B5EF4-FFF2-40B4-BE49-F238E27FC236}">
-                <a16:creationId xmlns:a16="http://schemas.microsoft.com/office/drawing/2014/main" id="{E4AA87B8-82AB-4420-B9CD-1CF48A8B2B38}"/>
+                <a16:creationId xmlns:a16="http://schemas.microsoft.com/office/drawing/2014/main" id="{E3DB81F6-DCBF-446B-8C01-BE09F6DFCB1A}"/>
               </a:ext>
             </a:extLst>
           </p:cNvPr>
@@ -3363,7 +3363,7 @@
           <p:cNvPr id="51" name="figure-two-frame">
             <a:extLst xmlns:a="http://schemas.openxmlformats.org/drawingml/2006/main">
               <a:ext uri="{FF2B5EF4-FFF2-40B4-BE49-F238E27FC236}">
-                <a16:creationId xmlns:a16="http://schemas.microsoft.com/office/drawing/2014/main" id="{6598E268-A9C3-4D57-A858-91418B298122}"/>
+                <a16:creationId xmlns:a16="http://schemas.microsoft.com/office/drawing/2014/main" id="{32353A23-4F4C-4564-AFB9-E9E88A67F209}"/>
               </a:ext>
             </a:extLst>
           </p:cNvPr>
@@ -3398,7 +3398,7 @@
           <p:cNvPr id="52" name="figure-two-placeholder">
             <a:extLst xmlns:a="http://schemas.openxmlformats.org/drawingml/2006/main">
               <a:ext uri="{FF2B5EF4-FFF2-40B4-BE49-F238E27FC236}">
-                <a16:creationId xmlns:a16="http://schemas.microsoft.com/office/drawing/2014/main" id="{0E8CFA78-F6BF-455E-A9EE-41C99F1DD2AF}"/>
+                <a16:creationId xmlns:a16="http://schemas.microsoft.com/office/drawing/2014/main" id="{A2C102EE-B1FE-4666-9335-6A1BE8594E4F}"/>
               </a:ext>
             </a:extLst>
           </p:cNvPr>
@@ -3433,7 +3433,7 @@
           <p:cNvPr id="53" name="figure-two-placeholder-label">
             <a:extLst xmlns:a="http://schemas.openxmlformats.org/drawingml/2006/main">
               <a:ext uri="{FF2B5EF4-FFF2-40B4-BE49-F238E27FC236}">
-                <a16:creationId xmlns:a16="http://schemas.microsoft.com/office/drawing/2014/main" id="{15302C2F-49AC-46AC-9CB9-4595C64D7335}"/>
+                <a16:creationId xmlns:a16="http://schemas.microsoft.com/office/drawing/2014/main" id="{606733EF-2672-488B-B705-40C056EF9601}"/>
               </a:ext>
             </a:extLst>
           </p:cNvPr>
@@ -3483,7 +3483,7 @@
           <p:cNvPr id="54" name="figure-two-caption">
             <a:extLst xmlns:a="http://schemas.openxmlformats.org/drawingml/2006/main">
               <a:ext uri="{FF2B5EF4-FFF2-40B4-BE49-F238E27FC236}">
-                <a16:creationId xmlns:a16="http://schemas.microsoft.com/office/drawing/2014/main" id="{78D9EA4F-3941-40FC-BEE7-FA364718737F}"/>
+                <a16:creationId xmlns:a16="http://schemas.microsoft.com/office/drawing/2014/main" id="{DC63ACB4-3E5A-4F91-84EA-C6AFD1759C5D}"/>
               </a:ext>
             </a:extLst>
           </p:cNvPr>
@@ -3533,7 +3533,7 @@
           <p:cNvPr id="55" name="figure-two-source">
             <a:extLst xmlns:a="http://schemas.openxmlformats.org/drawingml/2006/main">
               <a:ext uri="{FF2B5EF4-FFF2-40B4-BE49-F238E27FC236}">
-                <a16:creationId xmlns:a16="http://schemas.microsoft.com/office/drawing/2014/main" id="{26A6E478-2260-4DD1-89EC-7B21606242E6}"/>
+                <a16:creationId xmlns:a16="http://schemas.microsoft.com/office/drawing/2014/main" id="{92A5D58D-5E2B-4FD7-9EB6-ACBC158BBB8B}"/>
               </a:ext>
             </a:extLst>
           </p:cNvPr>
@@ -3583,7 +3583,7 @@
           <p:cNvPr id="56" name="validation-heading-title">
             <a:extLst xmlns:a="http://schemas.openxmlformats.org/drawingml/2006/main">
               <a:ext uri="{FF2B5EF4-FFF2-40B4-BE49-F238E27FC236}">
-                <a16:creationId xmlns:a16="http://schemas.microsoft.com/office/drawing/2014/main" id="{3A2E5264-6D10-402C-B817-D9C7FC11BFEB}"/>
+                <a16:creationId xmlns:a16="http://schemas.microsoft.com/office/drawing/2014/main" id="{186C448E-3CDE-4801-9878-F9AE8CB37250}"/>
               </a:ext>
             </a:extLst>
           </p:cNvPr>
@@ -3633,7 +3633,7 @@
           <p:cNvPr id="57" name="validation-heading-rule">
             <a:extLst xmlns:a="http://schemas.openxmlformats.org/drawingml/2006/main">
               <a:ext uri="{FF2B5EF4-FFF2-40B4-BE49-F238E27FC236}">
-                <a16:creationId xmlns:a16="http://schemas.microsoft.com/office/drawing/2014/main" id="{FDB365F7-26AE-49E0-B285-5B7414EAE0A9}"/>
+                <a16:creationId xmlns:a16="http://schemas.microsoft.com/office/drawing/2014/main" id="{3EE2CF76-FCDE-4906-9D81-8F236E06EA24}"/>
               </a:ext>
             </a:extLst>
           </p:cNvPr>
@@ -3666,7 +3666,7 @@
           <p:cNvPr id="58" name="validation-panel">
             <a:extLst xmlns:a="http://schemas.openxmlformats.org/drawingml/2006/main">
               <a:ext uri="{FF2B5EF4-FFF2-40B4-BE49-F238E27FC236}">
-                <a16:creationId xmlns:a16="http://schemas.microsoft.com/office/drawing/2014/main" id="{3E0E97E6-09A1-403C-B9D7-27C4D66743FE}"/>
+                <a16:creationId xmlns:a16="http://schemas.microsoft.com/office/drawing/2014/main" id="{ADA04048-F634-409B-B200-5C6BC3FC3CB1}"/>
               </a:ext>
             </a:extLst>
           </p:cNvPr>
@@ -3701,7 +3701,7 @@
           <p:cNvPr id="59" name="validation">
             <a:extLst xmlns:a="http://schemas.openxmlformats.org/drawingml/2006/main">
               <a:ext uri="{FF2B5EF4-FFF2-40B4-BE49-F238E27FC236}">
-                <a16:creationId xmlns:a16="http://schemas.microsoft.com/office/drawing/2014/main" id="{6D8C784C-8118-40BD-9FED-31F337FEDC6D}"/>
+                <a16:creationId xmlns:a16="http://schemas.microsoft.com/office/drawing/2014/main" id="{F874B855-D7B2-4ADF-B890-50AED743E2F1}"/>
               </a:ext>
             </a:extLst>
           </p:cNvPr>
@@ -3802,7 +3802,7 @@
           <p:cNvPr id="60" name="validation-evidence">
             <a:extLst xmlns:a="http://schemas.openxmlformats.org/drawingml/2006/main">
               <a:ext uri="{FF2B5EF4-FFF2-40B4-BE49-F238E27FC236}">
-                <a16:creationId xmlns:a16="http://schemas.microsoft.com/office/drawing/2014/main" id="{A2ECC448-1748-4FF4-972C-3F877FA0DC57}"/>
+                <a16:creationId xmlns:a16="http://schemas.microsoft.com/office/drawing/2014/main" id="{627E6B18-5F86-407B-BA71-A378ABFA8CFC}"/>
               </a:ext>
             </a:extLst>
           </p:cNvPr>
@@ -3852,7 +3852,7 @@
           <p:cNvPr id="61" name="performance-strip">
             <a:extLst xmlns:a="http://schemas.openxmlformats.org/drawingml/2006/main">
               <a:ext uri="{FF2B5EF4-FFF2-40B4-BE49-F238E27FC236}">
-                <a16:creationId xmlns:a16="http://schemas.microsoft.com/office/drawing/2014/main" id="{49CC6950-2425-434D-90B8-26E830E35C28}"/>
+                <a16:creationId xmlns:a16="http://schemas.microsoft.com/office/drawing/2014/main" id="{FD86AB09-0ECE-4277-9474-61E7D6924857}"/>
               </a:ext>
             </a:extLst>
           </p:cNvPr>
@@ -3885,7 +3885,7 @@
           <p:cNvPr id="62" name="performance-strip-text">
             <a:extLst xmlns:a="http://schemas.openxmlformats.org/drawingml/2006/main">
               <a:ext uri="{FF2B5EF4-FFF2-40B4-BE49-F238E27FC236}">
-                <a16:creationId xmlns:a16="http://schemas.microsoft.com/office/drawing/2014/main" id="{0921A86F-54B3-4E91-AC82-50EBC540A20E}"/>
+                <a16:creationId xmlns:a16="http://schemas.microsoft.com/office/drawing/2014/main" id="{4822CEE2-4D46-4798-9F85-11A1D4D8D024}"/>
               </a:ext>
             </a:extLst>
           </p:cNvPr>
@@ -3935,7 +3935,7 @@
           <p:cNvPr id="63" name="biology-heading-title">
             <a:extLst xmlns:a="http://schemas.openxmlformats.org/drawingml/2006/main">
               <a:ext uri="{FF2B5EF4-FFF2-40B4-BE49-F238E27FC236}">
-                <a16:creationId xmlns:a16="http://schemas.microsoft.com/office/drawing/2014/main" id="{88EB9E14-3445-40EB-B5D6-529AB6D3C11D}"/>
+                <a16:creationId xmlns:a16="http://schemas.microsoft.com/office/drawing/2014/main" id="{06D44C80-73C5-4E4C-9788-3DEBDA27D3FD}"/>
               </a:ext>
             </a:extLst>
           </p:cNvPr>
@@ -3985,7 +3985,7 @@
           <p:cNvPr id="64" name="biology-heading-rule">
             <a:extLst xmlns:a="http://schemas.openxmlformats.org/drawingml/2006/main">
               <a:ext uri="{FF2B5EF4-FFF2-40B4-BE49-F238E27FC236}">
-                <a16:creationId xmlns:a16="http://schemas.microsoft.com/office/drawing/2014/main" id="{9824FF06-4FA7-46C7-8722-C015F7F864EC}"/>
+                <a16:creationId xmlns:a16="http://schemas.microsoft.com/office/drawing/2014/main" id="{99A97413-B1B4-4010-A00A-7017FFFA78BA}"/>
               </a:ext>
             </a:extLst>
           </p:cNvPr>
@@ -4018,7 +4018,7 @@
           <p:cNvPr id="65" name="biology-1-value">
             <a:extLst xmlns:a="http://schemas.openxmlformats.org/drawingml/2006/main">
               <a:ext uri="{FF2B5EF4-FFF2-40B4-BE49-F238E27FC236}">
-                <a16:creationId xmlns:a16="http://schemas.microsoft.com/office/drawing/2014/main" id="{867F3AE8-E044-43F6-A345-B5B6CF02E0B5}"/>
+                <a16:creationId xmlns:a16="http://schemas.microsoft.com/office/drawing/2014/main" id="{E763691F-DE7B-4AFB-994D-448B432400E7}"/>
               </a:ext>
             </a:extLst>
           </p:cNvPr>
@@ -4068,7 +4068,7 @@
           <p:cNvPr id="66" name="biology-1-label">
             <a:extLst xmlns:a="http://schemas.openxmlformats.org/drawingml/2006/main">
               <a:ext uri="{FF2B5EF4-FFF2-40B4-BE49-F238E27FC236}">
-                <a16:creationId xmlns:a16="http://schemas.microsoft.com/office/drawing/2014/main" id="{15231BD3-5CBF-4AB0-8D3D-50A4168086E4}"/>
+                <a16:creationId xmlns:a16="http://schemas.microsoft.com/office/drawing/2014/main" id="{700B4E80-2877-48A6-9ED8-D7EFA5AD1FEF}"/>
               </a:ext>
             </a:extLst>
           </p:cNvPr>
@@ -4118,7 +4118,7 @@
           <p:cNvPr id="67" name="biology-2-value">
             <a:extLst xmlns:a="http://schemas.openxmlformats.org/drawingml/2006/main">
               <a:ext uri="{FF2B5EF4-FFF2-40B4-BE49-F238E27FC236}">
-                <a16:creationId xmlns:a16="http://schemas.microsoft.com/office/drawing/2014/main" id="{7085705D-C916-417C-9D48-1C6E4A3C78FD}"/>
+                <a16:creationId xmlns:a16="http://schemas.microsoft.com/office/drawing/2014/main" id="{476F4D4E-26AF-4297-BBD7-2ACB320AD98A}"/>
               </a:ext>
             </a:extLst>
           </p:cNvPr>
@@ -4168,7 +4168,7 @@
           <p:cNvPr id="68" name="biology-2-label">
             <a:extLst xmlns:a="http://schemas.openxmlformats.org/drawingml/2006/main">
               <a:ext uri="{FF2B5EF4-FFF2-40B4-BE49-F238E27FC236}">
-                <a16:creationId xmlns:a16="http://schemas.microsoft.com/office/drawing/2014/main" id="{1123B198-D985-4D07-8DB2-7CA9BE34055C}"/>
+                <a16:creationId xmlns:a16="http://schemas.microsoft.com/office/drawing/2014/main" id="{849A51BA-114F-48BF-BF66-129BAA4D9428}"/>
               </a:ext>
             </a:extLst>
           </p:cNvPr>
@@ -4218,7 +4218,7 @@
           <p:cNvPr id="69" name="biology-3-value">
             <a:extLst xmlns:a="http://schemas.openxmlformats.org/drawingml/2006/main">
               <a:ext uri="{FF2B5EF4-FFF2-40B4-BE49-F238E27FC236}">
-                <a16:creationId xmlns:a16="http://schemas.microsoft.com/office/drawing/2014/main" id="{35C2A292-E3F8-477A-8791-688C18027411}"/>
+                <a16:creationId xmlns:a16="http://schemas.microsoft.com/office/drawing/2014/main" id="{54371E5D-2FEC-4709-A8A8-8B30C8F59F3F}"/>
               </a:ext>
             </a:extLst>
           </p:cNvPr>
@@ -4268,7 +4268,7 @@
           <p:cNvPr id="70" name="biology-3-label">
             <a:extLst xmlns:a="http://schemas.openxmlformats.org/drawingml/2006/main">
               <a:ext uri="{FF2B5EF4-FFF2-40B4-BE49-F238E27FC236}">
-                <a16:creationId xmlns:a16="http://schemas.microsoft.com/office/drawing/2014/main" id="{D8C0C00D-1EE0-462E-AADC-5249F8E2D6E7}"/>
+                <a16:creationId xmlns:a16="http://schemas.microsoft.com/office/drawing/2014/main" id="{39A3F55D-7DF7-4C14-8FF5-269EF86AF8C8}"/>
               </a:ext>
             </a:extLst>
           </p:cNvPr>
@@ -4318,7 +4318,7 @@
           <p:cNvPr id="71" name="biology-evidence">
             <a:extLst xmlns:a="http://schemas.openxmlformats.org/drawingml/2006/main">
               <a:ext uri="{FF2B5EF4-FFF2-40B4-BE49-F238E27FC236}">
-                <a16:creationId xmlns:a16="http://schemas.microsoft.com/office/drawing/2014/main" id="{C8E74D2B-0C0D-4B17-9648-5E9BABD110F3}"/>
+                <a16:creationId xmlns:a16="http://schemas.microsoft.com/office/drawing/2014/main" id="{A8D3DA24-BF42-4FC3-B4D1-3276C6600158}"/>
               </a:ext>
             </a:extLst>
           </p:cNvPr>
@@ -4368,7 +4368,7 @@
           <p:cNvPr id="72" name="figure-three-frame">
             <a:extLst xmlns:a="http://schemas.openxmlformats.org/drawingml/2006/main">
               <a:ext uri="{FF2B5EF4-FFF2-40B4-BE49-F238E27FC236}">
-                <a16:creationId xmlns:a16="http://schemas.microsoft.com/office/drawing/2014/main" id="{A65B4CD3-0066-42B6-8D82-E11B4F87E9EC}"/>
+                <a16:creationId xmlns:a16="http://schemas.microsoft.com/office/drawing/2014/main" id="{2D6B1386-B624-4092-A575-739F880253BE}"/>
               </a:ext>
             </a:extLst>
           </p:cNvPr>
@@ -4403,7 +4403,7 @@
           <p:cNvPr id="73" name="figure-three-placeholder">
             <a:extLst xmlns:a="http://schemas.openxmlformats.org/drawingml/2006/main">
               <a:ext uri="{FF2B5EF4-FFF2-40B4-BE49-F238E27FC236}">
-                <a16:creationId xmlns:a16="http://schemas.microsoft.com/office/drawing/2014/main" id="{8DBE9BCF-C697-4BF7-9657-87C29772C78B}"/>
+                <a16:creationId xmlns:a16="http://schemas.microsoft.com/office/drawing/2014/main" id="{A11AE31B-BC36-486F-8B2D-AE41056A6B17}"/>
               </a:ext>
             </a:extLst>
           </p:cNvPr>
@@ -4438,7 +4438,7 @@
           <p:cNvPr id="74" name="figure-three-placeholder-label">
             <a:extLst xmlns:a="http://schemas.openxmlformats.org/drawingml/2006/main">
               <a:ext uri="{FF2B5EF4-FFF2-40B4-BE49-F238E27FC236}">
-                <a16:creationId xmlns:a16="http://schemas.microsoft.com/office/drawing/2014/main" id="{18C35503-17BB-48A0-A62D-2FE38E7F8759}"/>
+                <a16:creationId xmlns:a16="http://schemas.microsoft.com/office/drawing/2014/main" id="{D5B79B08-E314-4452-B5F9-A2CBB74C0E50}"/>
               </a:ext>
             </a:extLst>
           </p:cNvPr>
@@ -4488,7 +4488,7 @@
           <p:cNvPr id="75" name="figure-three-caption">
             <a:extLst xmlns:a="http://schemas.openxmlformats.org/drawingml/2006/main">
               <a:ext uri="{FF2B5EF4-FFF2-40B4-BE49-F238E27FC236}">
-                <a16:creationId xmlns:a16="http://schemas.microsoft.com/office/drawing/2014/main" id="{18A0C4DA-3604-431C-844E-B400A15BE056}"/>
+                <a16:creationId xmlns:a16="http://schemas.microsoft.com/office/drawing/2014/main" id="{1A82CB5A-23E8-48FF-9EDE-1CD071F4E902}"/>
               </a:ext>
             </a:extLst>
           </p:cNvPr>
@@ -4538,7 +4538,7 @@
           <p:cNvPr id="76" name="figure-three-source">
             <a:extLst xmlns:a="http://schemas.openxmlformats.org/drawingml/2006/main">
               <a:ext uri="{FF2B5EF4-FFF2-40B4-BE49-F238E27FC236}">
-                <a16:creationId xmlns:a16="http://schemas.microsoft.com/office/drawing/2014/main" id="{4C92EA32-3E04-4653-9DBE-CD007AAE8B4A}"/>
+                <a16:creationId xmlns:a16="http://schemas.microsoft.com/office/drawing/2014/main" id="{56A99529-CE67-40DD-B127-FBBBFD606EBF}"/>
               </a:ext>
             </a:extLst>
           </p:cNvPr>
@@ -4588,7 +4588,7 @@
           <p:cNvPr id="77" name="validation-visual-heading-title">
             <a:extLst xmlns:a="http://schemas.openxmlformats.org/drawingml/2006/main">
               <a:ext uri="{FF2B5EF4-FFF2-40B4-BE49-F238E27FC236}">
-                <a16:creationId xmlns:a16="http://schemas.microsoft.com/office/drawing/2014/main" id="{147D0588-2F59-4686-919B-D28D4939C8C3}"/>
+                <a16:creationId xmlns:a16="http://schemas.microsoft.com/office/drawing/2014/main" id="{451D2757-08D2-4689-A283-2035F3EC0500}"/>
               </a:ext>
             </a:extLst>
           </p:cNvPr>
@@ -4638,7 +4638,7 @@
           <p:cNvPr id="78" name="validation-visual-heading-rule">
             <a:extLst xmlns:a="http://schemas.openxmlformats.org/drawingml/2006/main">
               <a:ext uri="{FF2B5EF4-FFF2-40B4-BE49-F238E27FC236}">
-                <a16:creationId xmlns:a16="http://schemas.microsoft.com/office/drawing/2014/main" id="{7B67D96D-B917-4299-B764-A5457006B6F9}"/>
+                <a16:creationId xmlns:a16="http://schemas.microsoft.com/office/drawing/2014/main" id="{671E8B61-7D3E-4A73-8750-A486783A896D}"/>
               </a:ext>
             </a:extLst>
           </p:cNvPr>
@@ -4671,7 +4671,7 @@
           <p:cNvPr id="79" name="figure-four-frame">
             <a:extLst xmlns:a="http://schemas.openxmlformats.org/drawingml/2006/main">
               <a:ext uri="{FF2B5EF4-FFF2-40B4-BE49-F238E27FC236}">
-                <a16:creationId xmlns:a16="http://schemas.microsoft.com/office/drawing/2014/main" id="{7BE7719C-0F92-46E2-A50D-E63E130B019C}"/>
+                <a16:creationId xmlns:a16="http://schemas.microsoft.com/office/drawing/2014/main" id="{587EC641-ABD2-4CEF-AFDC-AAA277917B14}"/>
               </a:ext>
             </a:extLst>
           </p:cNvPr>
@@ -4706,7 +4706,7 @@
           <p:cNvPr id="80" name="figure-four-placeholder">
             <a:extLst xmlns:a="http://schemas.openxmlformats.org/drawingml/2006/main">
               <a:ext uri="{FF2B5EF4-FFF2-40B4-BE49-F238E27FC236}">
-                <a16:creationId xmlns:a16="http://schemas.microsoft.com/office/drawing/2014/main" id="{F65CBD41-2708-4EA2-BFCE-317ABACA0490}"/>
+                <a16:creationId xmlns:a16="http://schemas.microsoft.com/office/drawing/2014/main" id="{60183F81-E950-49A5-BF03-423673ED49E0}"/>
               </a:ext>
             </a:extLst>
           </p:cNvPr>
@@ -4741,7 +4741,7 @@
           <p:cNvPr id="81" name="figure-four-placeholder-label">
             <a:extLst xmlns:a="http://schemas.openxmlformats.org/drawingml/2006/main">
               <a:ext uri="{FF2B5EF4-FFF2-40B4-BE49-F238E27FC236}">
-                <a16:creationId xmlns:a16="http://schemas.microsoft.com/office/drawing/2014/main" id="{C541F0E7-9ED8-4B11-87BC-E65EEB9E3595}"/>
+                <a16:creationId xmlns:a16="http://schemas.microsoft.com/office/drawing/2014/main" id="{E7EE4D22-E09D-4606-8E65-128172257F0B}"/>
               </a:ext>
             </a:extLst>
           </p:cNvPr>
@@ -4791,7 +4791,7 @@
           <p:cNvPr id="82" name="figure-four-caption">
             <a:extLst xmlns:a="http://schemas.openxmlformats.org/drawingml/2006/main">
               <a:ext uri="{FF2B5EF4-FFF2-40B4-BE49-F238E27FC236}">
-                <a16:creationId xmlns:a16="http://schemas.microsoft.com/office/drawing/2014/main" id="{965F1C6C-9BA3-4104-A51E-C5BE5113543F}"/>
+                <a16:creationId xmlns:a16="http://schemas.microsoft.com/office/drawing/2014/main" id="{96F95185-DA5D-416F-8A21-2315F4A300A4}"/>
               </a:ext>
             </a:extLst>
           </p:cNvPr>
@@ -4841,7 +4841,7 @@
           <p:cNvPr id="83" name="figure-four-source">
             <a:extLst xmlns:a="http://schemas.openxmlformats.org/drawingml/2006/main">
               <a:ext uri="{FF2B5EF4-FFF2-40B4-BE49-F238E27FC236}">
-                <a16:creationId xmlns:a16="http://schemas.microsoft.com/office/drawing/2014/main" id="{D9FB48A5-3331-42C7-8FC7-14C9C196C75A}"/>
+                <a16:creationId xmlns:a16="http://schemas.microsoft.com/office/drawing/2014/main" id="{A94F7C02-A038-4D9C-A264-B720004A3F43}"/>
               </a:ext>
             </a:extLst>
           </p:cNvPr>
@@ -4891,7 +4891,7 @@
           <p:cNvPr id="84" name="conclusion-heading-title">
             <a:extLst xmlns:a="http://schemas.openxmlformats.org/drawingml/2006/main">
               <a:ext uri="{FF2B5EF4-FFF2-40B4-BE49-F238E27FC236}">
-                <a16:creationId xmlns:a16="http://schemas.microsoft.com/office/drawing/2014/main" id="{A2E0CFAB-0573-409A-84B6-ADDD1284D7DD}"/>
+                <a16:creationId xmlns:a16="http://schemas.microsoft.com/office/drawing/2014/main" id="{AA8A0541-8034-4693-9855-1468BB8F3949}"/>
               </a:ext>
             </a:extLst>
           </p:cNvPr>
@@ -4941,7 +4941,7 @@
           <p:cNvPr id="85" name="conclusion-heading-rule">
             <a:extLst xmlns:a="http://schemas.openxmlformats.org/drawingml/2006/main">
               <a:ext uri="{FF2B5EF4-FFF2-40B4-BE49-F238E27FC236}">
-                <a16:creationId xmlns:a16="http://schemas.microsoft.com/office/drawing/2014/main" id="{35E403A6-80FD-4EF0-9913-3EB8A4F013A0}"/>
+                <a16:creationId xmlns:a16="http://schemas.microsoft.com/office/drawing/2014/main" id="{5DFB5F45-1EB8-47E5-B899-D86AF7EDA1A0}"/>
               </a:ext>
             </a:extLst>
           </p:cNvPr>
@@ -4974,7 +4974,7 @@
           <p:cNvPr id="86" name="conclusion-panel">
             <a:extLst xmlns:a="http://schemas.openxmlformats.org/drawingml/2006/main">
               <a:ext uri="{FF2B5EF4-FFF2-40B4-BE49-F238E27FC236}">
-                <a16:creationId xmlns:a16="http://schemas.microsoft.com/office/drawing/2014/main" id="{0617EAC5-55E5-4578-B5FC-ED01EC1A787C}"/>
+                <a16:creationId xmlns:a16="http://schemas.microsoft.com/office/drawing/2014/main" id="{DE197782-EB32-439C-9BDA-F20FBEE8BB4C}"/>
               </a:ext>
             </a:extLst>
           </p:cNvPr>
@@ -5009,7 +5009,7 @@
           <p:cNvPr id="87" name="conclusion">
             <a:extLst xmlns:a="http://schemas.openxmlformats.org/drawingml/2006/main">
               <a:ext uri="{FF2B5EF4-FFF2-40B4-BE49-F238E27FC236}">
-                <a16:creationId xmlns:a16="http://schemas.microsoft.com/office/drawing/2014/main" id="{790D558D-6192-4AFE-9E24-19872DBF18F5}"/>
+                <a16:creationId xmlns:a16="http://schemas.microsoft.com/office/drawing/2014/main" id="{65D08354-5CE6-4B25-B7FA-0150A3370CED}"/>
               </a:ext>
             </a:extLst>
           </p:cNvPr>
@@ -5059,7 +5059,7 @@
           <p:cNvPr id="88" name="conclusion-evidence">
             <a:extLst xmlns:a="http://schemas.openxmlformats.org/drawingml/2006/main">
               <a:ext uri="{FF2B5EF4-FFF2-40B4-BE49-F238E27FC236}">
-                <a16:creationId xmlns:a16="http://schemas.microsoft.com/office/drawing/2014/main" id="{0D5E0955-3F73-475E-9C65-733F47490A34}"/>
+                <a16:creationId xmlns:a16="http://schemas.microsoft.com/office/drawing/2014/main" id="{3D326D71-5EE8-4FD7-AE22-E771973A1BE5}"/>
               </a:ext>
             </a:extLst>
           </p:cNvPr>
@@ -5109,7 +5109,7 @@
           <p:cNvPr id="89" name="footer-band">
             <a:extLst xmlns:a="http://schemas.openxmlformats.org/drawingml/2006/main">
               <a:ext uri="{FF2B5EF4-FFF2-40B4-BE49-F238E27FC236}">
-                <a16:creationId xmlns:a16="http://schemas.microsoft.com/office/drawing/2014/main" id="{641FF3F1-573F-49BE-BF4C-2013EEBEB73E}"/>
+                <a16:creationId xmlns:a16="http://schemas.microsoft.com/office/drawing/2014/main" id="{BF5D51FD-A24A-4C30-84A0-3EBEE5D2A6C4}"/>
               </a:ext>
             </a:extLst>
           </p:cNvPr>
@@ -5142,7 +5142,7 @@
           <p:cNvPr id="90" name="footer-source">
             <a:extLst xmlns:a="http://schemas.openxmlformats.org/drawingml/2006/main">
               <a:ext uri="{FF2B5EF4-FFF2-40B4-BE49-F238E27FC236}">
-                <a16:creationId xmlns:a16="http://schemas.microsoft.com/office/drawing/2014/main" id="{2396B612-8982-4B7A-9E15-3D0F293D91E6}"/>
+                <a16:creationId xmlns:a16="http://schemas.microsoft.com/office/drawing/2014/main" id="{B12DD77E-F29C-4DD6-BE15-A27A0FA31667}"/>
               </a:ext>
             </a:extLst>
           </p:cNvPr>
@@ -5192,7 +5192,7 @@
           <p:cNvPr id="91" name="footer-status">
             <a:extLst xmlns:a="http://schemas.openxmlformats.org/drawingml/2006/main">
               <a:ext uri="{FF2B5EF4-FFF2-40B4-BE49-F238E27FC236}">
-                <a16:creationId xmlns:a16="http://schemas.microsoft.com/office/drawing/2014/main" id="{42D8AC6B-FB0E-4093-A8FF-5E60CCE0B6D5}"/>
+                <a16:creationId xmlns:a16="http://schemas.microsoft.com/office/drawing/2014/main" id="{47B52AB1-A8D7-4436-832C-E7B5B03F6ECE}"/>
               </a:ext>
             </a:extLst>
           </p:cNvPr>
@@ -5240,7 +5240,7 @@
     </p:spTree>
     <p:extLst>
       <p:ext uri="{BB962C8B-B14F-4D97-AF65-F5344CB8AC3E}">
-        <p14:creationId xmlns:p14="http://schemas.microsoft.com/office/powerpoint/2010/main" val="1563003512"/>
+        <p14:creationId xmlns:p14="http://schemas.microsoft.com/office/powerpoint/2010/main" val="436810493"/>
       </p:ext>
     </p:extLst>
   </p:cSld>
